--- a/2026/LEC/03-2 Метрики анализа ВР.pptx
+++ b/2026/LEC/03-2 Метрики анализа ВР.pptx
@@ -216,7 +216,7 @@
           <a:p>
             <a:fld id="{CDA96C9A-3213-B245-BC64-7E419D14BD9D}" type="datetimeFigureOut">
               <a:rPr lang="ru-RU" smtClean="0"/>
-              <a:t>20.08.2025</a:t>
+              <a:t>12.03.2026</a:t>
             </a:fld>
             <a:endParaRPr lang="ru-RU"/>
           </a:p>
@@ -5410,7 +5410,7 @@
           <a:p>
             <a:fld id="{BEE214BE-636D-8A45-BCA6-8B7ED77AA124}" type="datetime1">
               <a:rPr lang="ru-RU" smtClean="0"/>
-              <a:t>20.08.2025</a:t>
+              <a:t>12.03.2026</a:t>
             </a:fld>
             <a:endParaRPr lang="en-US"/>
           </a:p>
@@ -5580,7 +5580,7 @@
           <a:p>
             <a:fld id="{5855274A-4ED4-0146-A3E9-88EF200B5196}" type="datetime1">
               <a:rPr lang="ru-RU" smtClean="0"/>
-              <a:t>20.08.2025</a:t>
+              <a:t>12.03.2026</a:t>
             </a:fld>
             <a:endParaRPr lang="en-US"/>
           </a:p>
@@ -5760,7 +5760,7 @@
           <a:p>
             <a:fld id="{8A78DFF1-9FDC-144B-973E-B4B4609709DF}" type="datetime1">
               <a:rPr lang="ru-RU" smtClean="0"/>
-              <a:t>20.08.2025</a:t>
+              <a:t>12.03.2026</a:t>
             </a:fld>
             <a:endParaRPr lang="en-US"/>
           </a:p>
@@ -5930,7 +5930,7 @@
           <a:p>
             <a:fld id="{8233A339-F8AE-5C45-BEAE-07EF9DC78B60}" type="datetime1">
               <a:rPr lang="ru-RU" smtClean="0"/>
-              <a:t>20.08.2025</a:t>
+              <a:t>12.03.2026</a:t>
             </a:fld>
             <a:endParaRPr lang="en-US"/>
           </a:p>
@@ -6176,7 +6176,7 @@
           <a:p>
             <a:fld id="{7586FDE4-97E0-CE4A-988C-F30B221290A7}" type="datetime1">
               <a:rPr lang="ru-RU" smtClean="0"/>
-              <a:t>20.08.2025</a:t>
+              <a:t>12.03.2026</a:t>
             </a:fld>
             <a:endParaRPr lang="en-US"/>
           </a:p>
@@ -6408,7 +6408,7 @@
           <a:p>
             <a:fld id="{C36ECE8B-8DEC-154E-9F03-047C8DDA20DC}" type="datetime1">
               <a:rPr lang="ru-RU" smtClean="0"/>
-              <a:t>20.08.2025</a:t>
+              <a:t>12.03.2026</a:t>
             </a:fld>
             <a:endParaRPr lang="en-US"/>
           </a:p>
@@ -6775,7 +6775,7 @@
           <a:p>
             <a:fld id="{440816D5-BDB8-B34B-8ACA-ECBDD12E7321}" type="datetime1">
               <a:rPr lang="ru-RU" smtClean="0"/>
-              <a:t>20.08.2025</a:t>
+              <a:t>12.03.2026</a:t>
             </a:fld>
             <a:endParaRPr lang="en-US"/>
           </a:p>
@@ -6893,7 +6893,7 @@
           <a:p>
             <a:fld id="{8A8C589A-5627-764C-AF96-C1E2F9A00A4D}" type="datetime1">
               <a:rPr lang="ru-RU" smtClean="0"/>
-              <a:t>20.08.2025</a:t>
+              <a:t>12.03.2026</a:t>
             </a:fld>
             <a:endParaRPr lang="en-US"/>
           </a:p>
@@ -6988,7 +6988,7 @@
           <a:p>
             <a:fld id="{603EE0D0-1696-6D4F-B917-4AFB24A74E8B}" type="datetime1">
               <a:rPr lang="ru-RU" smtClean="0"/>
-              <a:t>20.08.2025</a:t>
+              <a:t>12.03.2026</a:t>
             </a:fld>
             <a:endParaRPr lang="en-US"/>
           </a:p>
@@ -7265,7 +7265,7 @@
           <a:p>
             <a:fld id="{13C8A91E-B09B-2240-9AA3-B1D4BCC6296E}" type="datetime1">
               <a:rPr lang="ru-RU" smtClean="0"/>
-              <a:t>20.08.2025</a:t>
+              <a:t>12.03.2026</a:t>
             </a:fld>
             <a:endParaRPr lang="en-US"/>
           </a:p>
@@ -7522,7 +7522,7 @@
           <a:p>
             <a:fld id="{3BE9760E-DA8D-6747-B31E-62858C8727B8}" type="datetime1">
               <a:rPr lang="ru-RU" smtClean="0"/>
-              <a:t>20.08.2025</a:t>
+              <a:t>12.03.2026</a:t>
             </a:fld>
             <a:endParaRPr lang="en-US"/>
           </a:p>
@@ -7735,7 +7735,7 @@
           <a:p>
             <a:fld id="{D31305DF-F750-CC43-967D-51A20925EE94}" type="datetime1">
               <a:rPr lang="ru-RU" smtClean="0"/>
-              <a:t>20.08.2025</a:t>
+              <a:t>12.03.2026</a:t>
             </a:fld>
             <a:endParaRPr lang="en-US"/>
           </a:p>
@@ -8216,6 +8216,13 @@
   <p:clrMapOvr>
     <a:masterClrMapping/>
   </p:clrMapOvr>
+  <p:timing>
+    <p:tnLst>
+      <p:par>
+        <p:cTn id="1" dur="indefinite" restart="never" nodeType="tmRoot"/>
+      </p:par>
+    </p:tnLst>
+  </p:timing>
 </p:sld>
 </file>
 
@@ -8532,6 +8539,13 @@
   <p:clrMapOvr>
     <a:masterClrMapping/>
   </p:clrMapOvr>
+  <p:timing>
+    <p:tnLst>
+      <p:par>
+        <p:cTn id="1" dur="indefinite" restart="never" nodeType="tmRoot"/>
+      </p:par>
+    </p:tnLst>
+  </p:timing>
 </p:sld>
 </file>
 
@@ -9163,6 +9177,13 @@
   <p:clrMapOvr>
     <a:masterClrMapping/>
   </p:clrMapOvr>
+  <p:timing>
+    <p:tnLst>
+      <p:par>
+        <p:cTn id="1" dur="indefinite" restart="never" nodeType="tmRoot"/>
+      </p:par>
+    </p:tnLst>
+  </p:timing>
 </p:sld>
 </file>
 
@@ -9869,6 +9890,13 @@
   <p:clrMapOvr>
     <a:masterClrMapping/>
   </p:clrMapOvr>
+  <p:timing>
+    <p:tnLst>
+      <p:par>
+        <p:cTn id="1" dur="indefinite" restart="never" nodeType="tmRoot"/>
+      </p:par>
+    </p:tnLst>
+  </p:timing>
 </p:sld>
 </file>
 
@@ -10745,6 +10773,13 @@
   <p:clrMapOvr>
     <a:masterClrMapping/>
   </p:clrMapOvr>
+  <p:timing>
+    <p:tnLst>
+      <p:par>
+        <p:cTn id="1" dur="indefinite" restart="never" nodeType="tmRoot"/>
+      </p:par>
+    </p:tnLst>
+  </p:timing>
 </p:sld>
 </file>
 
@@ -12156,6 +12191,13 @@
   <p:clrMapOvr>
     <a:masterClrMapping/>
   </p:clrMapOvr>
+  <p:timing>
+    <p:tnLst>
+      <p:par>
+        <p:cTn id="1" dur="indefinite" restart="never" nodeType="tmRoot"/>
+      </p:par>
+    </p:tnLst>
+  </p:timing>
 </p:sld>
 </file>
 
@@ -12670,6 +12712,13 @@
   <p:clrMapOvr>
     <a:masterClrMapping/>
   </p:clrMapOvr>
+  <p:timing>
+    <p:tnLst>
+      <p:par>
+        <p:cTn id="1" dur="indefinite" restart="never" nodeType="tmRoot"/>
+      </p:par>
+    </p:tnLst>
+  </p:timing>
 </p:sld>
 </file>
 
@@ -12777,8 +12826,8 @@
           </a:p>
         </p:txBody>
       </p:sp>
-      <mc:AlternateContent xmlns:mc="http://schemas.openxmlformats.org/markup-compatibility/2006">
-        <mc:Choice xmlns:a14="http://schemas.microsoft.com/office/drawing/2010/main" Requires="a14">
+      <mc:AlternateContent xmlns:mc="http://schemas.openxmlformats.org/markup-compatibility/2006" xmlns:a14="http://schemas.microsoft.com/office/drawing/2010/main">
+        <mc:Choice Requires="a14">
           <p:graphicFrame>
             <p:nvGraphicFramePr>
               <p:cNvPr id="6" name="Таблица 5"/>
@@ -14313,7 +14362,7 @@
             </a:graphic>
           </p:graphicFrame>
         </mc:Choice>
-        <mc:Fallback>
+        <mc:Fallback xmlns="">
           <p:graphicFrame>
             <p:nvGraphicFramePr>
               <p:cNvPr id="6" name="Таблица 5"/>
@@ -15748,6 +15797,13 @@
   <p:clrMapOvr>
     <a:masterClrMapping/>
   </p:clrMapOvr>
+  <p:timing>
+    <p:tnLst>
+      <p:par>
+        <p:cTn id="1" dur="indefinite" restart="never" nodeType="tmRoot"/>
+      </p:par>
+    </p:tnLst>
+  </p:timing>
 </p:sld>
 </file>
 
@@ -17617,6 +17673,13 @@
   <p:clrMapOvr>
     <a:masterClrMapping/>
   </p:clrMapOvr>
+  <p:timing>
+    <p:tnLst>
+      <p:par>
+        <p:cTn id="1" dur="indefinite" restart="never" nodeType="tmRoot"/>
+      </p:par>
+    </p:tnLst>
+  </p:timing>
 </p:sld>
 </file>
 
@@ -18921,6 +18984,13 @@
   <p:clrMapOvr>
     <a:masterClrMapping/>
   </p:clrMapOvr>
+  <p:timing>
+    <p:tnLst>
+      <p:par>
+        <p:cTn id="1" dur="indefinite" restart="never" nodeType="tmRoot"/>
+      </p:par>
+    </p:tnLst>
+  </p:timing>
 </p:sld>
 </file>
 
@@ -20970,6 +21040,13 @@
   <p:clrMapOvr>
     <a:masterClrMapping/>
   </p:clrMapOvr>
+  <p:timing>
+    <p:tnLst>
+      <p:par>
+        <p:cTn id="1" dur="indefinite" restart="never" nodeType="tmRoot"/>
+      </p:par>
+    </p:tnLst>
+  </p:timing>
 </p:sld>
 </file>
 
@@ -21892,6 +21969,13 @@
   <p:clrMapOvr>
     <a:masterClrMapping/>
   </p:clrMapOvr>
+  <p:timing>
+    <p:tnLst>
+      <p:par>
+        <p:cTn id="1" dur="indefinite" restart="never" nodeType="tmRoot"/>
+      </p:par>
+    </p:tnLst>
+  </p:timing>
 </p:sld>
 </file>
 
@@ -22067,6 +22151,13 @@
   <p:clrMapOvr>
     <a:masterClrMapping/>
   </p:clrMapOvr>
+  <p:timing>
+    <p:tnLst>
+      <p:par>
+        <p:cTn id="1" dur="indefinite" restart="never" nodeType="tmRoot"/>
+      </p:par>
+    </p:tnLst>
+  </p:timing>
 </p:sld>
 </file>
 
@@ -24305,6 +24396,13 @@
   <p:clrMapOvr>
     <a:masterClrMapping/>
   </p:clrMapOvr>
+  <p:timing>
+    <p:tnLst>
+      <p:par>
+        <p:cTn id="1" dur="indefinite" restart="never" nodeType="tmRoot"/>
+      </p:par>
+    </p:tnLst>
+  </p:timing>
 </p:sld>
 </file>
 
@@ -25350,6 +25448,13 @@
   <p:clrMapOvr>
     <a:masterClrMapping/>
   </p:clrMapOvr>
+  <p:timing>
+    <p:tnLst>
+      <p:par>
+        <p:cTn id="1" dur="indefinite" restart="never" nodeType="tmRoot"/>
+      </p:par>
+    </p:tnLst>
+  </p:timing>
 </p:sld>
 </file>
 
@@ -27236,6 +27341,13 @@
   <p:clrMapOvr>
     <a:masterClrMapping/>
   </p:clrMapOvr>
+  <p:timing>
+    <p:tnLst>
+      <p:par>
+        <p:cTn id="1" dur="indefinite" restart="never" nodeType="tmRoot"/>
+      </p:par>
+    </p:tnLst>
+  </p:timing>
 </p:sld>
 </file>
 
@@ -31045,6 +31157,13 @@
   <p:clrMapOvr>
     <a:masterClrMapping/>
   </p:clrMapOvr>
+  <p:timing>
+    <p:tnLst>
+      <p:par>
+        <p:cTn id="1" dur="indefinite" restart="never" nodeType="tmRoot"/>
+      </p:par>
+    </p:tnLst>
+  </p:timing>
 </p:sld>
 </file>
 
@@ -32219,6 +32338,13 @@
   <p:clrMapOvr>
     <a:masterClrMapping/>
   </p:clrMapOvr>
+  <p:timing>
+    <p:tnLst>
+      <p:par>
+        <p:cTn id="1" dur="indefinite" restart="never" nodeType="tmRoot"/>
+      </p:par>
+    </p:tnLst>
+  </p:timing>
 </p:sld>
 </file>
 
@@ -34577,6 +34703,13 @@
   <p:clrMapOvr>
     <a:masterClrMapping/>
   </p:clrMapOvr>
+  <p:timing>
+    <p:tnLst>
+      <p:par>
+        <p:cTn id="1" dur="indefinite" restart="never" nodeType="tmRoot"/>
+      </p:par>
+    </p:tnLst>
+  </p:timing>
 </p:sld>
 </file>
 
@@ -35042,6 +35175,13 @@
   <p:clrMapOvr>
     <a:masterClrMapping/>
   </p:clrMapOvr>
+  <p:timing>
+    <p:tnLst>
+      <p:par>
+        <p:cTn id="1" dur="indefinite" restart="never" nodeType="tmRoot"/>
+      </p:par>
+    </p:tnLst>
+  </p:timing>
 </p:sld>
 </file>
 

--- a/2026/LEC/03-2 Метрики анализа ВР.pptx
+++ b/2026/LEC/03-2 Метрики анализа ВР.pptx
@@ -216,7 +216,7 @@
           <a:p>
             <a:fld id="{CDA96C9A-3213-B245-BC64-7E419D14BD9D}" type="datetimeFigureOut">
               <a:rPr lang="ru-RU" smtClean="0"/>
-              <a:t>12.03.2026</a:t>
+              <a:t>19.03.2026</a:t>
             </a:fld>
             <a:endParaRPr lang="ru-RU"/>
           </a:p>
@@ -5410,7 +5410,7 @@
           <a:p>
             <a:fld id="{BEE214BE-636D-8A45-BCA6-8B7ED77AA124}" type="datetime1">
               <a:rPr lang="ru-RU" smtClean="0"/>
-              <a:t>12.03.2026</a:t>
+              <a:t>19.03.2026</a:t>
             </a:fld>
             <a:endParaRPr lang="en-US"/>
           </a:p>
@@ -5580,7 +5580,7 @@
           <a:p>
             <a:fld id="{5855274A-4ED4-0146-A3E9-88EF200B5196}" type="datetime1">
               <a:rPr lang="ru-RU" smtClean="0"/>
-              <a:t>12.03.2026</a:t>
+              <a:t>19.03.2026</a:t>
             </a:fld>
             <a:endParaRPr lang="en-US"/>
           </a:p>
@@ -5760,7 +5760,7 @@
           <a:p>
             <a:fld id="{8A78DFF1-9FDC-144B-973E-B4B4609709DF}" type="datetime1">
               <a:rPr lang="ru-RU" smtClean="0"/>
-              <a:t>12.03.2026</a:t>
+              <a:t>19.03.2026</a:t>
             </a:fld>
             <a:endParaRPr lang="en-US"/>
           </a:p>
@@ -5930,7 +5930,7 @@
           <a:p>
             <a:fld id="{8233A339-F8AE-5C45-BEAE-07EF9DC78B60}" type="datetime1">
               <a:rPr lang="ru-RU" smtClean="0"/>
-              <a:t>12.03.2026</a:t>
+              <a:t>19.03.2026</a:t>
             </a:fld>
             <a:endParaRPr lang="en-US"/>
           </a:p>
@@ -6176,7 +6176,7 @@
           <a:p>
             <a:fld id="{7586FDE4-97E0-CE4A-988C-F30B221290A7}" type="datetime1">
               <a:rPr lang="ru-RU" smtClean="0"/>
-              <a:t>12.03.2026</a:t>
+              <a:t>19.03.2026</a:t>
             </a:fld>
             <a:endParaRPr lang="en-US"/>
           </a:p>
@@ -6408,7 +6408,7 @@
           <a:p>
             <a:fld id="{C36ECE8B-8DEC-154E-9F03-047C8DDA20DC}" type="datetime1">
               <a:rPr lang="ru-RU" smtClean="0"/>
-              <a:t>12.03.2026</a:t>
+              <a:t>19.03.2026</a:t>
             </a:fld>
             <a:endParaRPr lang="en-US"/>
           </a:p>
@@ -6775,7 +6775,7 @@
           <a:p>
             <a:fld id="{440816D5-BDB8-B34B-8ACA-ECBDD12E7321}" type="datetime1">
               <a:rPr lang="ru-RU" smtClean="0"/>
-              <a:t>12.03.2026</a:t>
+              <a:t>19.03.2026</a:t>
             </a:fld>
             <a:endParaRPr lang="en-US"/>
           </a:p>
@@ -6893,7 +6893,7 @@
           <a:p>
             <a:fld id="{8A8C589A-5627-764C-AF96-C1E2F9A00A4D}" type="datetime1">
               <a:rPr lang="ru-RU" smtClean="0"/>
-              <a:t>12.03.2026</a:t>
+              <a:t>19.03.2026</a:t>
             </a:fld>
             <a:endParaRPr lang="en-US"/>
           </a:p>
@@ -6988,7 +6988,7 @@
           <a:p>
             <a:fld id="{603EE0D0-1696-6D4F-B917-4AFB24A74E8B}" type="datetime1">
               <a:rPr lang="ru-RU" smtClean="0"/>
-              <a:t>12.03.2026</a:t>
+              <a:t>19.03.2026</a:t>
             </a:fld>
             <a:endParaRPr lang="en-US"/>
           </a:p>
@@ -7265,7 +7265,7 @@
           <a:p>
             <a:fld id="{13C8A91E-B09B-2240-9AA3-B1D4BCC6296E}" type="datetime1">
               <a:rPr lang="ru-RU" smtClean="0"/>
-              <a:t>12.03.2026</a:t>
+              <a:t>19.03.2026</a:t>
             </a:fld>
             <a:endParaRPr lang="en-US"/>
           </a:p>
@@ -7522,7 +7522,7 @@
           <a:p>
             <a:fld id="{3BE9760E-DA8D-6747-B31E-62858C8727B8}" type="datetime1">
               <a:rPr lang="ru-RU" smtClean="0"/>
-              <a:t>12.03.2026</a:t>
+              <a:t>19.03.2026</a:t>
             </a:fld>
             <a:endParaRPr lang="en-US"/>
           </a:p>
@@ -7735,7 +7735,7 @@
           <a:p>
             <a:fld id="{D31305DF-F750-CC43-967D-51A20925EE94}" type="datetime1">
               <a:rPr lang="ru-RU" smtClean="0"/>
-              <a:t>12.03.2026</a:t>
+              <a:t>19.03.2026</a:t>
             </a:fld>
             <a:endParaRPr lang="en-US"/>
           </a:p>
@@ -9970,8 +9970,8 @@
           </a:p>
         </p:txBody>
       </p:sp>
-      <mc:AlternateContent xmlns:mc="http://schemas.openxmlformats.org/markup-compatibility/2006" xmlns:a14="http://schemas.microsoft.com/office/drawing/2010/main">
-        <mc:Choice Requires="a14">
+      <mc:AlternateContent xmlns:mc="http://schemas.openxmlformats.org/markup-compatibility/2006">
+        <mc:Choice xmlns:a14="http://schemas.microsoft.com/office/drawing/2010/main" Requires="a14">
           <p:sp>
             <p:nvSpPr>
               <p:cNvPr id="7" name="Прямоугольник 6"/>
@@ -10221,15 +10221,15 @@
                 </a14:m>
                 <a:r>
                   <a:rPr lang="ru-RU" sz="2200" dirty="0"/>
-                  <a:t> - оценка стандартного </a:t>
+                  <a:t> - оценка </a:t>
                 </a:r>
                 <a:r>
-                  <a:rPr lang="ru-RU" sz="2200" dirty="0" err="1"/>
-                  <a:t>распределния</a:t>
+                  <a:rPr lang="ru-RU" sz="2200"/>
+                  <a:t>стандартного </a:t>
                 </a:r>
                 <a:r>
-                  <a:rPr lang="ru-RU" sz="2200" dirty="0"/>
-                  <a:t>, </a:t>
+                  <a:rPr lang="ru-RU" sz="2200" smtClean="0"/>
+                  <a:t>распределения, </a:t>
                 </a:r>
                 <a:r>
                   <a:rPr lang="ru-RU" sz="2200" i="1" dirty="0">
@@ -10535,7 +10535,7 @@
             </p:txBody>
           </p:sp>
         </mc:Choice>
-        <mc:Fallback xmlns="">
+        <mc:Fallback>
           <p:sp>
             <p:nvSpPr>
               <p:cNvPr id="7" name="Прямоугольник 6"/>
